--- a/sjoskolan/vecka-40/aktuell/Mandag_28_sep_vecka40.pptx
+++ b/sjoskolan/vecka-40/aktuell/Mandag_28_sep_vecka40.pptx
@@ -20037,7 +20037,7 @@
       </p:pic>
       <p:pic>
         <p:nvPicPr>
-          <p:cNvPr id="9" name="Bildobjekt 1"/>
+          <p:cNvPr id="10" name="omslag-brytare" descr="Effektbrytare i FRÅN-läge, låst med rött hänglås och gul skylt: FRÅNSKILD, MANÖVRERA EJ."/>
           <p:cNvPicPr>
             <a:picLocks noChangeAspect="1"/>
           </p:cNvPicPr>
@@ -20046,7 +20046,7 @@
         <p:blipFill>
           <a:blip r:embed="rId3"/>
           <a:stretch>
-            <a:fillRect l="0" t="0" r="0" b="0"/>
+            <a:fillRect/>
           </a:stretch>
         </p:blipFill>
         <p:spPr>
